--- a/vidio-review-analysis-openrouter-gpt-oss-120b/reports/report_vidio_sports_movies_series.pptx
+++ b/vidio-review-analysis-openrouter-gpt-oss-120b/reports/report_vidio_sports_movies_series.pptx
@@ -4410,6 +4410,42 @@
           </a:p>
         </p:txBody>
       </p:sp>
+      <p:sp>
+        <p:nvSpPr>
+          <p:cNvPr id="19" name="TextBox 18"/>
+          <p:cNvSpPr txBox="1"/>
+          <p:nvPr/>
+        </p:nvSpPr>
+        <p:spPr>
+          <a:xfrm>
+            <a:off x="731520" y="6126480"/>
+            <a:ext cx="10698480" cy="320040"/>
+          </a:xfrm>
+          <a:prstGeom prst="rect">
+            <a:avLst/>
+          </a:prstGeom>
+          <a:noFill/>
+        </p:spPr>
+        <p:txBody>
+          <a:bodyPr wrap="square" lIns="0" tIns="0" bIns="0" rIns="0">
+            <a:spAutoFit/>
+          </a:bodyPr>
+          <a:lstStyle/>
+          <a:p>
+            <a:pPr>
+              <a:defRPr sz="850">
+                <a:solidFill>
+                  <a:srgbClr val="718096"/>
+                </a:solidFill>
+                <a:latin typeface="Segoe UI"/>
+              </a:defRPr>
+            </a:pPr>
+            <a:r>
+              <a:t>⚠️ Catatan Cakupan Data: Analisis ini hanya mencakup ulasan yang memiliki teks komentar. Ulasan dengan rating tanpa komentar tidak diikutsertakan, sehingga distribusi sentimen mencerminkan pengguna yang aktif memberikan pendapat dan dapat condong ke arah negatif dibanding populasi pengguna keseluruhan.</a:t>
+            </a:r>
+          </a:p>
+        </p:txBody>
+      </p:sp>
     </p:spTree>
   </p:cSld>
   <p:clrMapOvr>
@@ -5106,9 +5142,57 @@
           </a:p>
         </p:txBody>
       </p:sp>
-      <p:sp>
-        <p:nvSpPr>
-          <p:cNvPr id="6" name="TextBox 5"/>
+      <p:pic>
+        <p:nvPicPr>
+          <p:cNvPr id="6" name="Picture 5" descr="09_cs_reply_rate.png"/>
+          <p:cNvPicPr>
+            <a:picLocks noChangeAspect="1"/>
+          </p:cNvPicPr>
+          <p:nvPr/>
+        </p:nvPicPr>
+        <p:blipFill>
+          <a:blip r:embed="rId2"/>
+          <a:stretch>
+            <a:fillRect/>
+          </a:stretch>
+        </p:blipFill>
+        <p:spPr>
+          <a:xfrm>
+            <a:off x="731520" y="1965960"/>
+            <a:ext cx="5029200" cy="2926080"/>
+          </a:xfrm>
+          <a:prstGeom prst="rect">
+            <a:avLst/>
+          </a:prstGeom>
+        </p:spPr>
+      </p:pic>
+      <p:pic>
+        <p:nvPicPr>
+          <p:cNvPr id="7" name="Picture 6" descr="10_cs_reply_delay.png"/>
+          <p:cNvPicPr>
+            <a:picLocks noChangeAspect="1"/>
+          </p:cNvPicPr>
+          <p:nvPr/>
+        </p:nvPicPr>
+        <p:blipFill>
+          <a:blip r:embed="rId3"/>
+          <a:stretch>
+            <a:fillRect/>
+          </a:stretch>
+        </p:blipFill>
+        <p:spPr>
+          <a:xfrm>
+            <a:off x="6400800" y="1965960"/>
+            <a:ext cx="5029200" cy="2926080"/>
+          </a:xfrm>
+          <a:prstGeom prst="rect">
+            <a:avLst/>
+          </a:prstGeom>
+        </p:spPr>
+      </p:pic>
+      <p:sp>
+        <p:nvSpPr>
+          <p:cNvPr id="8" name="TextBox 7"/>
           <p:cNvSpPr txBox="1"/>
           <p:nvPr/>
         </p:nvSpPr>
